--- a/entregas/posts/site/kit/editavel/efeito-rebote-sex-30-10.pptx
+++ b/entregas/posts/site/kit/editavel/efeito-rebote-sex-30-10.pptx
@@ -4143,7 +4143,7 @@
         </p:nvSpPr>
         <p:spPr>
           <a:xfrm>
-            <a:off x="915442" y="4166387"/>
+            <a:off x="915442" y="4105488"/>
             <a:ext cx="4776341" cy="304495"/>
           </a:xfrm>
           <a:prstGeom prst="rect">
@@ -4169,13 +4169,13 @@
               </a:spcAft>
             </a:pPr>
             <a:r>
-              <a:rPr b="0" i="0" sz="2397" lang="pt-BR">
+              <a:rPr b="1" i="0" sz="2397" lang="pt-BR">
                 <a:solidFill>
                   <a:srgbClr val="E9C46A"/>
                 </a:solidFill>
-                <a:latin typeface="Barlow SemiBold"/>
-                <a:ea typeface="Barlow SemiBold"/>
-                <a:cs typeface="Barlow SemiBold"/>
+                <a:latin typeface="Barlow"/>
+                <a:ea typeface="Barlow"/>
+                <a:cs typeface="Barlow"/>
               </a:rPr>
               <a:t>Série Entenda o projeto · parte 5</a:t>
             </a:r>
@@ -4190,7 +4190,7 @@
         </p:nvSpPr>
         <p:spPr>
           <a:xfrm>
-            <a:off x="915442" y="4921833"/>
+            <a:off x="915442" y="4645732"/>
             <a:ext cx="6067202" cy="3689747"/>
           </a:xfrm>
           <a:prstGeom prst="rect">
@@ -4261,7 +4261,7 @@
         </p:nvSpPr>
         <p:spPr>
           <a:xfrm>
-            <a:off x="915442" y="8795275"/>
+            <a:off x="915442" y="8835292"/>
             <a:ext cx="5217771" cy="1040427"/>
           </a:xfrm>
           <a:prstGeom prst="rect">
@@ -4308,7 +4308,7 @@
         </p:nvSpPr>
         <p:spPr>
           <a:xfrm>
-            <a:off x="915442" y="11515488"/>
+            <a:off x="915442" y="11496457"/>
             <a:ext cx="1210717" cy="437712"/>
           </a:xfrm>
           <a:prstGeom prst="rect">
@@ -4638,7 +4638,7 @@
         </p:nvSpPr>
         <p:spPr>
           <a:xfrm>
-            <a:off x="915442" y="1079840"/>
+            <a:off x="915442" y="1018941"/>
             <a:ext cx="2758604" cy="304495"/>
           </a:xfrm>
           <a:prstGeom prst="rect">
@@ -4664,13 +4664,13 @@
               </a:spcAft>
             </a:pPr>
             <a:r>
-              <a:rPr b="0" i="0" sz="2397" lang="pt-BR">
+              <a:rPr b="1" i="0" sz="2397" lang="pt-BR">
                 <a:solidFill>
                   <a:srgbClr val="B5121B"/>
                 </a:solidFill>
-                <a:latin typeface="Barlow SemiBold"/>
-                <a:ea typeface="Barlow SemiBold"/>
-                <a:cs typeface="Barlow SemiBold"/>
+                <a:latin typeface="Barlow"/>
+                <a:ea typeface="Barlow"/>
+                <a:cs typeface="Barlow"/>
               </a:rPr>
               <a:t>Caminho 1: estudo</a:t>
             </a:r>
@@ -4685,7 +4685,7 @@
         </p:nvSpPr>
         <p:spPr>
           <a:xfrm>
-            <a:off x="915442" y="4659185"/>
+            <a:off x="915442" y="4449618"/>
             <a:ext cx="8635335" cy="933524"/>
           </a:xfrm>
           <a:prstGeom prst="rect">
@@ -4732,7 +4732,7 @@
         </p:nvSpPr>
         <p:spPr>
           <a:xfrm>
-            <a:off x="1353145" y="6222617"/>
+            <a:off x="1353145" y="6294647"/>
             <a:ext cx="7515231" cy="1656681"/>
           </a:xfrm>
           <a:prstGeom prst="rect">
@@ -4790,7 +4790,7 @@
         </p:nvSpPr>
         <p:spPr>
           <a:xfrm>
-            <a:off x="915442" y="11515488"/>
+            <a:off x="915442" y="11496457"/>
             <a:ext cx="2069708" cy="437712"/>
           </a:xfrm>
           <a:prstGeom prst="rect">
@@ -5096,7 +5096,7 @@
         </p:nvSpPr>
         <p:spPr>
           <a:xfrm>
-            <a:off x="915442" y="1079840"/>
+            <a:off x="915442" y="1018941"/>
             <a:ext cx="3035766" cy="304495"/>
           </a:xfrm>
           <a:prstGeom prst="rect">
@@ -5122,13 +5122,13 @@
               </a:spcAft>
             </a:pPr>
             <a:r>
-              <a:rPr b="0" i="0" sz="2397" lang="pt-BR">
+              <a:rPr b="1" i="0" sz="2397" lang="pt-BR">
                 <a:solidFill>
                   <a:srgbClr val="B5121B"/>
                 </a:solidFill>
-                <a:latin typeface="Barlow SemiBold"/>
-                <a:ea typeface="Barlow SemiBold"/>
-                <a:cs typeface="Barlow SemiBold"/>
+                <a:latin typeface="Barlow"/>
+                <a:ea typeface="Barlow"/>
+                <a:cs typeface="Barlow"/>
               </a:rPr>
               <a:t>Caminho 2: trabalho</a:t>
             </a:r>
@@ -5143,7 +5143,7 @@
         </p:nvSpPr>
         <p:spPr>
           <a:xfrm>
-            <a:off x="915442" y="4468536"/>
+            <a:off x="915442" y="4258969"/>
             <a:ext cx="6191949" cy="1867049"/>
           </a:xfrm>
           <a:prstGeom prst="rect">
@@ -5202,7 +5202,7 @@
         </p:nvSpPr>
         <p:spPr>
           <a:xfrm>
-            <a:off x="1353145" y="6965418"/>
+            <a:off x="1353145" y="7037448"/>
             <a:ext cx="7623355" cy="1104454"/>
           </a:xfrm>
           <a:prstGeom prst="rect">
@@ -5260,7 +5260,7 @@
         </p:nvSpPr>
         <p:spPr>
           <a:xfrm>
-            <a:off x="915442" y="11515488"/>
+            <a:off x="915442" y="11496457"/>
             <a:ext cx="2169408" cy="437712"/>
           </a:xfrm>
           <a:prstGeom prst="rect">
@@ -5566,7 +5566,7 @@
         </p:nvSpPr>
         <p:spPr>
           <a:xfrm>
-            <a:off x="915442" y="1079840"/>
+            <a:off x="915442" y="1018941"/>
             <a:ext cx="2846353" cy="304495"/>
           </a:xfrm>
           <a:prstGeom prst="rect">
@@ -5592,13 +5592,13 @@
               </a:spcAft>
             </a:pPr>
             <a:r>
-              <a:rPr b="0" i="0" sz="2397" lang="pt-BR">
+              <a:rPr b="1" i="0" sz="2397" lang="pt-BR">
                 <a:solidFill>
                   <a:srgbClr val="B5121B"/>
                 </a:solidFill>
-                <a:latin typeface="Barlow SemiBold"/>
-                <a:ea typeface="Barlow SemiBold"/>
-                <a:cs typeface="Barlow SemiBold"/>
+                <a:latin typeface="Barlow"/>
+                <a:ea typeface="Barlow"/>
+                <a:cs typeface="Barlow"/>
               </a:rPr>
               <a:t>Caminho 3: vínculo</a:t>
             </a:r>
@@ -5613,7 +5613,7 @@
         </p:nvSpPr>
         <p:spPr>
           <a:xfrm>
-            <a:off x="915442" y="3449956"/>
+            <a:off x="915442" y="3240389"/>
             <a:ext cx="6047393" cy="1867049"/>
           </a:xfrm>
           <a:prstGeom prst="rect">
@@ -5672,7 +5672,7 @@
         </p:nvSpPr>
         <p:spPr>
           <a:xfrm>
-            <a:off x="1353145" y="5946838"/>
+            <a:off x="1353145" y="6018868"/>
             <a:ext cx="7759458" cy="2208908"/>
           </a:xfrm>
           <a:prstGeom prst="rect">
@@ -5741,7 +5741,7 @@
         </p:nvSpPr>
         <p:spPr>
           <a:xfrm>
-            <a:off x="915442" y="8935605"/>
+            <a:off x="915442" y="9007635"/>
             <a:ext cx="7403574" cy="552227"/>
           </a:xfrm>
           <a:prstGeom prst="rect">
@@ -5788,7 +5788,7 @@
         </p:nvSpPr>
         <p:spPr>
           <a:xfrm>
-            <a:off x="915442" y="11515339"/>
+            <a:off x="915442" y="11496308"/>
             <a:ext cx="3427199" cy="437712"/>
           </a:xfrm>
           <a:prstGeom prst="rect">
@@ -6061,7 +6061,7 @@
         </p:nvSpPr>
         <p:spPr>
           <a:xfrm>
-            <a:off x="915442" y="1079840"/>
+            <a:off x="915442" y="1018941"/>
             <a:ext cx="1418139" cy="304495"/>
           </a:xfrm>
           <a:prstGeom prst="rect">
@@ -6087,13 +6087,13 @@
               </a:spcAft>
             </a:pPr>
             <a:r>
-              <a:rPr b="0" i="0" sz="2397" lang="pt-BR">
+              <a:rPr b="1" i="0" sz="2397" lang="pt-BR">
                 <a:solidFill>
                   <a:srgbClr val="B5121B"/>
                 </a:solidFill>
-                <a:latin typeface="Barlow SemiBold"/>
-                <a:ea typeface="Barlow SemiBold"/>
-                <a:cs typeface="Barlow SemiBold"/>
+                <a:latin typeface="Barlow"/>
+                <a:ea typeface="Barlow"/>
+                <a:cs typeface="Barlow"/>
               </a:rPr>
               <a:t>O projeto</a:t>
             </a:r>
@@ -6108,7 +6108,7 @@
         </p:nvSpPr>
         <p:spPr>
           <a:xfrm>
-            <a:off x="915442" y="4868139"/>
+            <a:off x="915442" y="4658572"/>
             <a:ext cx="7001828" cy="1867049"/>
           </a:xfrm>
           <a:prstGeom prst="rect">
@@ -6167,7 +6167,7 @@
         </p:nvSpPr>
         <p:spPr>
           <a:xfrm>
-            <a:off x="915442" y="6965418"/>
+            <a:off x="915442" y="7037448"/>
             <a:ext cx="8600114" cy="1104454"/>
           </a:xfrm>
           <a:prstGeom prst="rect">
@@ -6214,7 +6214,7 @@
         </p:nvSpPr>
         <p:spPr>
           <a:xfrm>
-            <a:off x="915442" y="11515488"/>
+            <a:off x="915442" y="11496457"/>
             <a:ext cx="1849517" cy="437712"/>
           </a:xfrm>
           <a:prstGeom prst="rect">
@@ -6342,7 +6342,7 @@
         </p:nvSpPr>
         <p:spPr>
           <a:xfrm>
-            <a:off x="3643298" y="5430830"/>
+            <a:off x="3643298" y="5369931"/>
             <a:ext cx="3000405" cy="304495"/>
           </a:xfrm>
           <a:prstGeom prst="rect">
@@ -6368,13 +6368,13 @@
               </a:spcAft>
             </a:pPr>
             <a:r>
-              <a:rPr b="0" i="0" sz="2397" lang="pt-BR">
+              <a:rPr b="1" i="0" sz="2397" lang="pt-BR">
                 <a:solidFill>
                   <a:srgbClr val="E9C46A"/>
                 </a:solidFill>
-                <a:latin typeface="Barlow SemiBold"/>
-                <a:ea typeface="Barlow SemiBold"/>
-                <a:cs typeface="Barlow SemiBold"/>
+                <a:latin typeface="Barlow"/>
+                <a:ea typeface="Barlow"/>
+                <a:cs typeface="Barlow"/>
               </a:rPr>
               <a:t>Na semana que vem</a:t>
             </a:r>
@@ -6389,7 +6389,7 @@
         </p:nvSpPr>
         <p:spPr>
           <a:xfrm>
-            <a:off x="1110206" y="6199556"/>
+            <a:off x="1110206" y="5989989"/>
             <a:ext cx="8066440" cy="1867049"/>
           </a:xfrm>
           <a:prstGeom prst="rect">
@@ -6448,7 +6448,7 @@
         </p:nvSpPr>
         <p:spPr>
           <a:xfrm>
-            <a:off x="2531872" y="8670860"/>
+            <a:off x="2531872" y="8572105"/>
             <a:ext cx="5223108" cy="493776"/>
           </a:xfrm>
           <a:prstGeom prst="rect">
